--- a/05_Linkedin_Posts/01_Latex.pptx
+++ b/05_Linkedin_Posts/01_Latex.pptx
@@ -6,7 +6,6 @@
   </p:sldMasterIdLst>
   <p:sldIdLst>
     <p:sldId id="259" r:id="rId2"/>
-    <p:sldId id="258" r:id="rId3"/>
   </p:sldIdLst>
   <p:sldSz cx="12192000" cy="6858000"/>
   <p:notesSz cx="6858000" cy="9144000"/>
@@ -262,7 +261,7 @@
           <a:p>
             <a:fld id="{9D4686FF-3DC0-4D03-9102-64E826D8EE6E}" type="datetimeFigureOut">
               <a:rPr lang="LID4096" smtClean="0"/>
-              <a:t>06/19/2026</a:t>
+              <a:t>06/24/2026</a:t>
             </a:fld>
             <a:endParaRPr lang="LID4096"/>
           </a:p>
@@ -462,7 +461,7 @@
           <a:p>
             <a:fld id="{9D4686FF-3DC0-4D03-9102-64E826D8EE6E}" type="datetimeFigureOut">
               <a:rPr lang="LID4096" smtClean="0"/>
-              <a:t>06/19/2026</a:t>
+              <a:t>06/24/2026</a:t>
             </a:fld>
             <a:endParaRPr lang="LID4096"/>
           </a:p>
@@ -672,7 +671,7 @@
           <a:p>
             <a:fld id="{9D4686FF-3DC0-4D03-9102-64E826D8EE6E}" type="datetimeFigureOut">
               <a:rPr lang="LID4096" smtClean="0"/>
-              <a:t>06/19/2026</a:t>
+              <a:t>06/24/2026</a:t>
             </a:fld>
             <a:endParaRPr lang="LID4096"/>
           </a:p>
@@ -872,7 +871,7 @@
           <a:p>
             <a:fld id="{9D4686FF-3DC0-4D03-9102-64E826D8EE6E}" type="datetimeFigureOut">
               <a:rPr lang="LID4096" smtClean="0"/>
-              <a:t>06/19/2026</a:t>
+              <a:t>06/24/2026</a:t>
             </a:fld>
             <a:endParaRPr lang="LID4096"/>
           </a:p>
@@ -1148,7 +1147,7 @@
           <a:p>
             <a:fld id="{9D4686FF-3DC0-4D03-9102-64E826D8EE6E}" type="datetimeFigureOut">
               <a:rPr lang="LID4096" smtClean="0"/>
-              <a:t>06/19/2026</a:t>
+              <a:t>06/24/2026</a:t>
             </a:fld>
             <a:endParaRPr lang="LID4096"/>
           </a:p>
@@ -1416,7 +1415,7 @@
           <a:p>
             <a:fld id="{9D4686FF-3DC0-4D03-9102-64E826D8EE6E}" type="datetimeFigureOut">
               <a:rPr lang="LID4096" smtClean="0"/>
-              <a:t>06/19/2026</a:t>
+              <a:t>06/24/2026</a:t>
             </a:fld>
             <a:endParaRPr lang="LID4096"/>
           </a:p>
@@ -1831,7 +1830,7 @@
           <a:p>
             <a:fld id="{9D4686FF-3DC0-4D03-9102-64E826D8EE6E}" type="datetimeFigureOut">
               <a:rPr lang="LID4096" smtClean="0"/>
-              <a:t>06/19/2026</a:t>
+              <a:t>06/24/2026</a:t>
             </a:fld>
             <a:endParaRPr lang="LID4096"/>
           </a:p>
@@ -1973,7 +1972,7 @@
           <a:p>
             <a:fld id="{9D4686FF-3DC0-4D03-9102-64E826D8EE6E}" type="datetimeFigureOut">
               <a:rPr lang="LID4096" smtClean="0"/>
-              <a:t>06/19/2026</a:t>
+              <a:t>06/24/2026</a:t>
             </a:fld>
             <a:endParaRPr lang="LID4096"/>
           </a:p>
@@ -2086,7 +2085,7 @@
           <a:p>
             <a:fld id="{9D4686FF-3DC0-4D03-9102-64E826D8EE6E}" type="datetimeFigureOut">
               <a:rPr lang="LID4096" smtClean="0"/>
-              <a:t>06/19/2026</a:t>
+              <a:t>06/24/2026</a:t>
             </a:fld>
             <a:endParaRPr lang="LID4096"/>
           </a:p>
@@ -2399,7 +2398,7 @@
           <a:p>
             <a:fld id="{9D4686FF-3DC0-4D03-9102-64E826D8EE6E}" type="datetimeFigureOut">
               <a:rPr lang="LID4096" smtClean="0"/>
-              <a:t>06/19/2026</a:t>
+              <a:t>06/24/2026</a:t>
             </a:fld>
             <a:endParaRPr lang="LID4096"/>
           </a:p>
@@ -2688,7 +2687,7 @@
           <a:p>
             <a:fld id="{9D4686FF-3DC0-4D03-9102-64E826D8EE6E}" type="datetimeFigureOut">
               <a:rPr lang="LID4096" smtClean="0"/>
-              <a:t>06/19/2026</a:t>
+              <a:t>06/24/2026</a:t>
             </a:fld>
             <a:endParaRPr lang="LID4096"/>
           </a:p>
@@ -2931,7 +2930,7 @@
           <a:p>
             <a:fld id="{9D4686FF-3DC0-4D03-9102-64E826D8EE6E}" type="datetimeFigureOut">
               <a:rPr lang="LID4096" smtClean="0"/>
-              <a:t>06/19/2026</a:t>
+              <a:t>06/24/2026</a:t>
             </a:fld>
             <a:endParaRPr lang="LID4096"/>
           </a:p>
@@ -3697,10 +3696,16 @@
                 <a:t>- </a:t>
               </a:r>
               <a:r>
+                <a:rPr lang="pt-BR" sz="2000" b="1" u="sng" dirty="0">
+                  <a:latin typeface="Horley Old Style"/>
+                </a:rPr>
+                <a:t>Reconhecedor d caracteres </a:t>
+              </a:r>
+              <a:r>
                 <a:rPr lang="pt-BR" sz="2200" b="1" u="sng" dirty="0">
                   <a:latin typeface="Horley Old Style"/>
                 </a:rPr>
-                <a:t>Reconhece os caracteres  </a:t>
+                <a:t> </a:t>
               </a:r>
             </a:p>
             <a:p>
@@ -4128,10 +4133,10 @@
         </p:nvGrpSpPr>
         <p:grpSpPr>
           <a:xfrm>
-            <a:off x="1373855" y="4158348"/>
-            <a:ext cx="8369735" cy="2222446"/>
-            <a:chOff x="1072748" y="4269235"/>
-            <a:chExt cx="8369735" cy="2222446"/>
+            <a:off x="1327531" y="4158348"/>
+            <a:ext cx="8416059" cy="2222446"/>
+            <a:chOff x="1026424" y="4269235"/>
+            <a:chExt cx="8416059" cy="2222446"/>
           </a:xfrm>
         </p:grpSpPr>
         <p:grpSp>
@@ -4148,10 +4153,10 @@
           </p:nvGrpSpPr>
           <p:grpSpPr>
             <a:xfrm>
-              <a:off x="1072748" y="4269235"/>
-              <a:ext cx="8369735" cy="2222446"/>
-              <a:chOff x="1355552" y="3959086"/>
-              <a:chExt cx="8369735" cy="2222446"/>
+              <a:off x="1026424" y="4269235"/>
+              <a:ext cx="8416059" cy="2222446"/>
+              <a:chOff x="1309228" y="3959086"/>
+              <a:chExt cx="8416059" cy="2222446"/>
             </a:xfrm>
           </p:grpSpPr>
           <p:sp>
@@ -4227,7 +4232,19 @@
               <p:nvPr/>
             </p:nvPicPr>
             <p:blipFill>
-              <a:blip r:embed="rId4"/>
+              <a:blip r:embed="rId4">
+                <a:extLst>
+                  <a:ext uri="{BEBA8EAE-BF5A-486C-A8C5-ECC9F3942E4B}">
+                    <a14:imgProps xmlns:a14="http://schemas.microsoft.com/office/drawing/2010/main">
+                      <a14:imgLayer r:embed="rId5">
+                        <a14:imgEffect>
+                          <a14:artisticTexturizer/>
+                        </a14:imgEffect>
+                      </a14:imgLayer>
+                    </a14:imgProps>
+                  </a:ext>
+                </a:extLst>
+              </a:blip>
               <a:srcRect l="5358" t="3913" r="4219" b="19578"/>
               <a:stretch>
                 <a:fillRect/>
@@ -4235,8 +4252,8 @@
             </p:blipFill>
             <p:spPr>
               <a:xfrm>
-                <a:off x="1355552" y="3959087"/>
-                <a:ext cx="2645884" cy="918838"/>
+                <a:off x="1309228" y="3959087"/>
+                <a:ext cx="2855168" cy="991516"/>
               </a:xfrm>
               <a:prstGeom prst="rect">
                 <a:avLst/>
@@ -4258,8 +4275,8 @@
               </a:effectLst>
             </p:spPr>
           </p:pic>
-          <mc:AlternateContent xmlns:mc="http://schemas.openxmlformats.org/markup-compatibility/2006">
-            <mc:Choice xmlns:a14="http://schemas.microsoft.com/office/drawing/2010/main" Requires="a14">
+          <mc:AlternateContent xmlns:mc="http://schemas.openxmlformats.org/markup-compatibility/2006" xmlns:a14="http://schemas.microsoft.com/office/drawing/2010/main">
+            <mc:Choice Requires="a14">
               <p:sp>
                 <p:nvSpPr>
                   <p:cNvPr id="21" name="TextBox 20">
@@ -4488,7 +4505,7 @@
                 </p:txBody>
               </p:sp>
             </mc:Choice>
-            <mc:Fallback>
+            <mc:Fallback xmlns="">
               <p:sp>
                 <p:nvSpPr>
                   <p:cNvPr id="21" name="TextBox 20">
@@ -4512,7 +4529,7 @@
                     <a:avLst/>
                   </a:prstGeom>
                   <a:blipFill>
-                    <a:blip r:embed="rId5"/>
+                    <a:blip r:embed="rId6"/>
                     <a:stretch>
                       <a:fillRect/>
                     </a:stretch>
@@ -4714,7 +4731,7 @@
             </p:nvSpPr>
             <p:spPr>
               <a:xfrm rot="2162833">
-                <a:off x="3966922" y="5012532"/>
+                <a:off x="3985028" y="5057799"/>
                 <a:ext cx="317578" cy="389449"/>
               </a:xfrm>
               <a:prstGeom prst="rightArrow">
@@ -4827,8 +4844,8 @@
           </p:nvSpPr>
           <p:spPr>
             <a:xfrm>
-              <a:off x="2177717" y="5480799"/>
-              <a:ext cx="1429759" cy="400110"/>
+              <a:off x="1781191" y="5480799"/>
+              <a:ext cx="1826286" cy="430887"/>
             </a:xfrm>
             <a:prstGeom prst="rect">
               <a:avLst/>
@@ -4841,15 +4858,16 @@
             </a:bodyPr>
             <a:lstStyle/>
             <a:p>
+              <a:pPr algn="r"/>
               <a:r>
-                <a:rPr lang="pt-BR" sz="2000" b="1" dirty="0">
+                <a:rPr lang="pt-BR" sz="2200" b="1" dirty="0">
                   <a:solidFill>
                     <a:srgbClr val="FF0000"/>
                   </a:solidFill>
                 </a:rPr>
                 <a:t>.. predição</a:t>
               </a:r>
-              <a:endParaRPr lang="en-US" sz="1600" b="1" dirty="0">
+              <a:endParaRPr lang="en-US" sz="2200" b="1" dirty="0">
                 <a:solidFill>
                   <a:srgbClr val="FF0000"/>
                 </a:solidFill>
@@ -4871,8 +4889,8 @@
           </p:nvSpPr>
           <p:spPr>
             <a:xfrm>
-              <a:off x="7280309" y="5473318"/>
-              <a:ext cx="2067599" cy="400110"/>
+              <a:off x="6981415" y="5473318"/>
+              <a:ext cx="2366493" cy="430887"/>
             </a:xfrm>
             <a:prstGeom prst="rect">
               <a:avLst/>
@@ -4886,14 +4904,14 @@
             <a:lstStyle/>
             <a:p>
               <a:r>
-                <a:rPr lang="pt-BR" sz="2000" b="1" dirty="0">
+                <a:rPr lang="pt-BR" sz="2200" b="1" dirty="0">
                   <a:solidFill>
                     <a:srgbClr val="FF0000"/>
                   </a:solidFill>
                 </a:rPr>
                 <a:t>.. renderização</a:t>
               </a:r>
-              <a:endParaRPr lang="en-US" sz="1600" b="1" dirty="0">
+              <a:endParaRPr lang="en-US" sz="2200" b="1" dirty="0">
                 <a:solidFill>
                   <a:srgbClr val="FF0000"/>
                 </a:solidFill>
@@ -5252,8 +5270,8 @@
         </p:nvSpPr>
         <p:spPr>
           <a:xfrm>
-            <a:off x="1372796" y="5902556"/>
-            <a:ext cx="1429759" cy="400110"/>
+            <a:off x="1327531" y="5902556"/>
+            <a:ext cx="1429759" cy="461665"/>
           </a:xfrm>
           <a:prstGeom prst="rect">
             <a:avLst/>
@@ -5267,14 +5285,14 @@
           <a:lstStyle/>
           <a:p>
             <a:r>
-              <a:rPr lang="pt-BR" sz="2000" b="1" dirty="0">
+              <a:rPr lang="pt-BR" sz="2400" b="1" dirty="0">
                 <a:solidFill>
                   <a:srgbClr val="FF0000"/>
                 </a:solidFill>
               </a:rPr>
               <a:t>RES:</a:t>
             </a:r>
-            <a:endParaRPr lang="en-US" sz="1600" b="1" dirty="0">
+            <a:endParaRPr lang="en-US" b="1" dirty="0">
               <a:solidFill>
                 <a:srgbClr val="FF0000"/>
               </a:solidFill>
@@ -5282,341 +5300,172 @@
           </a:p>
         </p:txBody>
       </p:sp>
-      <p:sp>
-        <p:nvSpPr>
-          <p:cNvPr id="11" name="TextBox 10">
-            <a:extLst>
-              <a:ext uri="{FF2B5EF4-FFF2-40B4-BE49-F238E27FC236}">
-                <a16:creationId xmlns:a16="http://schemas.microsoft.com/office/drawing/2014/main" id="{55E355AF-88EA-5E10-A105-8998572D2E9A}"/>
-              </a:ext>
-            </a:extLst>
-          </p:cNvPr>
-          <p:cNvSpPr txBox="1"/>
+      <p:grpSp>
+        <p:nvGrpSpPr>
+          <p:cNvPr id="15" name="Group 14">
+            <a:extLst>
+              <a:ext uri="{FF2B5EF4-FFF2-40B4-BE49-F238E27FC236}">
+                <a16:creationId xmlns:a16="http://schemas.microsoft.com/office/drawing/2014/main" id="{8A051B33-90CE-62E3-06B7-42BBC9D357A9}"/>
+              </a:ext>
+            </a:extLst>
+          </p:cNvPr>
+          <p:cNvGrpSpPr/>
           <p:nvPr/>
-        </p:nvSpPr>
-        <p:spPr>
+        </p:nvGrpSpPr>
+        <p:grpSpPr>
           <a:xfrm>
             <a:off x="4372217" y="4351343"/>
             <a:ext cx="2384084" cy="918838"/>
+            <a:chOff x="4372217" y="4351343"/>
+            <a:chExt cx="2384084" cy="918838"/>
           </a:xfrm>
-          <a:prstGeom prst="rect">
-            <a:avLst/>
-          </a:prstGeom>
-          <a:solidFill>
-            <a:schemeClr val="bg1"/>
-          </a:solidFill>
-          <a:ln>
+        </p:grpSpPr>
+        <p:sp>
+          <p:nvSpPr>
+            <p:cNvPr id="11" name="TextBox 10">
+              <a:extLst>
+                <a:ext uri="{FF2B5EF4-FFF2-40B4-BE49-F238E27FC236}">
+                  <a16:creationId xmlns:a16="http://schemas.microsoft.com/office/drawing/2014/main" id="{55E355AF-88EA-5E10-A105-8998572D2E9A}"/>
+                </a:ext>
+              </a:extLst>
+            </p:cNvPr>
+            <p:cNvSpPr txBox="1"/>
+            <p:nvPr/>
+          </p:nvSpPr>
+          <p:spPr>
+            <a:xfrm>
+              <a:off x="4372217" y="4351343"/>
+              <a:ext cx="2384084" cy="918838"/>
+            </a:xfrm>
+            <a:prstGeom prst="rect">
+              <a:avLst/>
+            </a:prstGeom>
             <a:solidFill>
-              <a:schemeClr val="tx1"/>
+              <a:schemeClr val="bg1"/>
             </a:solidFill>
-          </a:ln>
-          <a:effectLst>
-            <a:outerShdw blurRad="50800" dist="38100" dir="8100000" algn="tr" rotWithShape="0">
-              <a:prstClr val="black">
-                <a:alpha val="40000"/>
-              </a:prstClr>
-            </a:outerShdw>
-          </a:effectLst>
-        </p:spPr>
-        <p:txBody>
-          <a:bodyPr wrap="square" lIns="0" tIns="0" rIns="0" bIns="0" rtlCol="0" anchor="ctr" anchorCtr="0">
-            <a:noAutofit/>
-          </a:bodyPr>
-          <a:lstStyle/>
-          <a:p>
-            <a:pPr/>
-            <a:endParaRPr lang="LID4096" sz="3200" b="1" i="1" dirty="0">
-              <a:effectLst>
-                <a:outerShdw blurRad="38100" dist="38100" dir="2700000" algn="tl">
-                  <a:srgbClr val="000000">
-                    <a:alpha val="43137"/>
+            <a:ln>
+              <a:solidFill>
+                <a:schemeClr val="tx1"/>
+              </a:solidFill>
+            </a:ln>
+            <a:effectLst>
+              <a:outerShdw blurRad="50800" dist="38100" dir="8100000" algn="tr" rotWithShape="0">
+                <a:prstClr val="black">
+                  <a:alpha val="40000"/>
+                </a:prstClr>
+              </a:outerShdw>
+            </a:effectLst>
+          </p:spPr>
+          <p:txBody>
+            <a:bodyPr wrap="square" lIns="0" tIns="0" rIns="0" bIns="0" rtlCol="0" anchor="ctr" anchorCtr="0">
+              <a:noAutofit/>
+            </a:bodyPr>
+            <a:lstStyle/>
+            <a:p>
+              <a:endParaRPr lang="LID4096" sz="3200" b="1" i="1" dirty="0">
+                <a:effectLst>
+                  <a:outerShdw blurRad="38100" dist="38100" dir="2700000" algn="tl">
+                    <a:srgbClr val="000000">
+                      <a:alpha val="43137"/>
+                    </a:srgbClr>
+                  </a:outerShdw>
+                </a:effectLst>
+              </a:endParaRPr>
+            </a:p>
+          </p:txBody>
+        </p:sp>
+        <p:pic>
+          <p:nvPicPr>
+            <p:cNvPr id="14" name="Picture 13">
+              <a:extLst>
+                <a:ext uri="{FF2B5EF4-FFF2-40B4-BE49-F238E27FC236}">
+                  <a16:creationId xmlns:a16="http://schemas.microsoft.com/office/drawing/2014/main" id="{C97E7732-C692-F62D-0E41-68E22B98D001}"/>
+                </a:ext>
+              </a:extLst>
+            </p:cNvPr>
+            <p:cNvPicPr>
+              <a:picLocks noChangeAspect="1"/>
+            </p:cNvPicPr>
+            <p:nvPr/>
+          </p:nvPicPr>
+          <p:blipFill>
+            <a:blip r:embed="rId7">
+              <a:clrChange>
+                <a:clrFrom>
+                  <a:srgbClr val="FFFFFF"/>
+                </a:clrFrom>
+                <a:clrTo>
+                  <a:srgbClr val="FFFFFF">
+                    <a:alpha val="0"/>
                   </a:srgbClr>
-                </a:outerShdw>
-              </a:effectLst>
-            </a:endParaRPr>
-          </a:p>
-        </p:txBody>
-      </p:sp>
-      <p:pic>
-        <p:nvPicPr>
-          <p:cNvPr id="14" name="Picture 13">
-            <a:extLst>
-              <a:ext uri="{FF2B5EF4-FFF2-40B4-BE49-F238E27FC236}">
-                <a16:creationId xmlns:a16="http://schemas.microsoft.com/office/drawing/2014/main" id="{C97E7732-C692-F62D-0E41-68E22B98D001}"/>
-              </a:ext>
-            </a:extLst>
-          </p:cNvPr>
-          <p:cNvPicPr>
-            <a:picLocks noChangeAspect="1"/>
-          </p:cNvPicPr>
-          <p:nvPr/>
-        </p:nvPicPr>
-        <p:blipFill>
-          <a:blip r:embed="rId6">
-            <a:clrChange>
-              <a:clrFrom>
-                <a:srgbClr val="FFFFFF"/>
-              </a:clrFrom>
-              <a:clrTo>
-                <a:srgbClr val="FFFFFF">
-                  <a:alpha val="0"/>
-                </a:srgbClr>
-              </a:clrTo>
-            </a:clrChange>
-          </a:blip>
-          <a:stretch>
-            <a:fillRect/>
-          </a:stretch>
-        </p:blipFill>
-        <p:spPr>
-          <a:xfrm>
-            <a:off x="4478803" y="4437394"/>
-            <a:ext cx="2269126" cy="790791"/>
-          </a:xfrm>
-          <a:prstGeom prst="rect">
-            <a:avLst/>
-          </a:prstGeom>
-          <a:noFill/>
-          <a:ln>
+                </a:clrTo>
+              </a:clrChange>
+            </a:blip>
+            <a:srcRect l="1221" t="1811" r="3833"/>
+            <a:stretch>
+              <a:fillRect/>
+            </a:stretch>
+          </p:blipFill>
+          <p:spPr>
+            <a:xfrm>
+              <a:off x="4470289" y="4448067"/>
+              <a:ext cx="2154441" cy="776471"/>
+            </a:xfrm>
+            <a:prstGeom prst="rect">
+              <a:avLst/>
+            </a:prstGeom>
             <a:noFill/>
-          </a:ln>
-          <a:effectLst/>
-        </p:spPr>
-      </p:pic>
+            <a:ln>
+              <a:noFill/>
+            </a:ln>
+            <a:effectLst/>
+          </p:spPr>
+        </p:pic>
+        <p:sp>
+          <p:nvSpPr>
+            <p:cNvPr id="3" name="TextBox 2">
+              <a:extLst>
+                <a:ext uri="{FF2B5EF4-FFF2-40B4-BE49-F238E27FC236}">
+                  <a16:creationId xmlns:a16="http://schemas.microsoft.com/office/drawing/2014/main" id="{A1E61368-AF9E-D58F-BA89-49E20124ED26}"/>
+                </a:ext>
+              </a:extLst>
+            </p:cNvPr>
+            <p:cNvSpPr txBox="1"/>
+            <p:nvPr/>
+          </p:nvSpPr>
+          <p:spPr>
+            <a:xfrm>
+              <a:off x="4429159" y="4757026"/>
+              <a:ext cx="839932" cy="404617"/>
+            </a:xfrm>
+            <a:prstGeom prst="rect">
+              <a:avLst/>
+            </a:prstGeom>
+            <a:noFill/>
+          </p:spPr>
+          <p:txBody>
+            <a:bodyPr wrap="square" lIns="0" tIns="0" rIns="0" bIns="0" anchor="b" anchorCtr="0">
+              <a:noAutofit/>
+            </a:bodyPr>
+            <a:lstStyle/>
+            <a:p>
+              <a:r>
+                <a:rPr lang="pt-BR" sz="4000" b="1" dirty="0">
+                  <a:solidFill>
+                    <a:srgbClr val="FF0000"/>
+                  </a:solidFill>
+                  <a:latin typeface="Horley Old Style"/>
+                </a:rPr>
+                <a:t>___</a:t>
+              </a:r>
+            </a:p>
+          </p:txBody>
+        </p:sp>
+      </p:grpSp>
     </p:spTree>
     <p:extLst>
       <p:ext uri="{BB962C8B-B14F-4D97-AF65-F5344CB8AC3E}">
         <p14:creationId xmlns:p14="http://schemas.microsoft.com/office/powerpoint/2010/main" val="3375607533"/>
-      </p:ext>
-    </p:extLst>
-  </p:cSld>
-  <p:clrMapOvr>
-    <a:masterClrMapping/>
-  </p:clrMapOvr>
-</p:sld>
-</file>
-
-<file path=ppt/slides/slide2.xml><?xml version="1.0" encoding="utf-8"?>
-<p:sld xmlns:a="http://schemas.openxmlformats.org/drawingml/2006/main" xmlns:r="http://schemas.openxmlformats.org/officeDocument/2006/relationships" xmlns:p="http://schemas.openxmlformats.org/presentationml/2006/main">
-  <p:cSld>
-    <p:spTree>
-      <p:nvGrpSpPr>
-        <p:cNvPr id="1" name=""/>
-        <p:cNvGrpSpPr/>
-        <p:nvPr/>
-      </p:nvGrpSpPr>
-      <p:grpSpPr>
-        <a:xfrm>
-          <a:off x="0" y="0"/>
-          <a:ext cx="0" cy="0"/>
-          <a:chOff x="0" y="0"/>
-          <a:chExt cx="0" cy="0"/>
-        </a:xfrm>
-      </p:grpSpPr>
-      <p:pic>
-        <p:nvPicPr>
-          <p:cNvPr id="4" name="Picture 3">
-            <a:extLst>
-              <a:ext uri="{FF2B5EF4-FFF2-40B4-BE49-F238E27FC236}">
-                <a16:creationId xmlns:a16="http://schemas.microsoft.com/office/drawing/2014/main" id="{BDE69118-26F8-B30E-9B82-B0E93B889A1D}"/>
-              </a:ext>
-            </a:extLst>
-          </p:cNvPr>
-          <p:cNvPicPr>
-            <a:picLocks noChangeAspect="1"/>
-          </p:cNvPicPr>
-          <p:nvPr/>
-        </p:nvPicPr>
-        <p:blipFill>
-          <a:blip r:embed="rId2"/>
-          <a:stretch>
-            <a:fillRect/>
-          </a:stretch>
-        </p:blipFill>
-        <p:spPr>
-          <a:xfrm>
-            <a:off x="3280743" y="49581"/>
-            <a:ext cx="5347902" cy="2109032"/>
-          </a:xfrm>
-          <a:prstGeom prst="rect">
-            <a:avLst/>
-          </a:prstGeom>
-          <a:ln>
-            <a:solidFill>
-              <a:schemeClr val="tx1"/>
-            </a:solidFill>
-          </a:ln>
-          <a:effectLst>
-            <a:outerShdw blurRad="50800" dist="38100" dir="8100000" algn="tr" rotWithShape="0">
-              <a:prstClr val="black">
-                <a:alpha val="40000"/>
-              </a:prstClr>
-            </a:outerShdw>
-          </a:effectLst>
-        </p:spPr>
-      </p:pic>
-      <p:sp>
-        <p:nvSpPr>
-          <p:cNvPr id="5" name="TextBox 4">
-            <a:extLst>
-              <a:ext uri="{FF2B5EF4-FFF2-40B4-BE49-F238E27FC236}">
-                <a16:creationId xmlns:a16="http://schemas.microsoft.com/office/drawing/2014/main" id="{115F85A9-FF1B-56FF-B4F8-080257483BDE}"/>
-              </a:ext>
-            </a:extLst>
-          </p:cNvPr>
-          <p:cNvSpPr txBox="1"/>
-          <p:nvPr/>
-        </p:nvSpPr>
-        <p:spPr>
-          <a:xfrm>
-            <a:off x="302155" y="2512337"/>
-            <a:ext cx="5510170" cy="461665"/>
-          </a:xfrm>
-          <a:prstGeom prst="rect">
-            <a:avLst/>
-          </a:prstGeom>
-          <a:noFill/>
-        </p:spPr>
-        <p:txBody>
-          <a:bodyPr wrap="square">
-            <a:spAutoFit/>
-          </a:bodyPr>
-          <a:lstStyle/>
-          <a:p>
-            <a:r>
-              <a:rPr lang="en-GB" sz="2400" b="1" i="0" u="none" strike="noStrike" baseline="0" dirty="0">
-                <a:latin typeface="LMRoman12-Regular"/>
-              </a:rPr>
-              <a:t>Field Operation and Manipulation - FOAM</a:t>
-            </a:r>
-            <a:endParaRPr lang="LID4096" sz="2400" b="1" dirty="0"/>
-          </a:p>
-        </p:txBody>
-      </p:sp>
-      <p:sp>
-        <p:nvSpPr>
-          <p:cNvPr id="2" name="TextBox 1">
-            <a:extLst>
-              <a:ext uri="{FF2B5EF4-FFF2-40B4-BE49-F238E27FC236}">
-                <a16:creationId xmlns:a16="http://schemas.microsoft.com/office/drawing/2014/main" id="{410C4A4A-5E27-8923-9BEB-9770C7183970}"/>
-              </a:ext>
-            </a:extLst>
-          </p:cNvPr>
-          <p:cNvSpPr txBox="1"/>
-          <p:nvPr/>
-        </p:nvSpPr>
-        <p:spPr>
-          <a:xfrm>
-            <a:off x="8103544" y="6439087"/>
-            <a:ext cx="4798337" cy="369332"/>
-          </a:xfrm>
-          <a:prstGeom prst="rect">
-            <a:avLst/>
-          </a:prstGeom>
-          <a:noFill/>
-        </p:spPr>
-        <p:txBody>
-          <a:bodyPr wrap="square" rtlCol="0">
-            <a:spAutoFit/>
-          </a:bodyPr>
-          <a:lstStyle/>
-          <a:p>
-            <a:r>
-              <a:rPr lang="pt-BR" dirty="0"/>
-              <a:t>Para bom entendedor ½ palavra basta</a:t>
-            </a:r>
-            <a:endParaRPr lang="LID4096" dirty="0"/>
-          </a:p>
-        </p:txBody>
-      </p:sp>
-      <p:pic>
-        <p:nvPicPr>
-          <p:cNvPr id="8" name="Picture 7">
-            <a:extLst>
-              <a:ext uri="{FF2B5EF4-FFF2-40B4-BE49-F238E27FC236}">
-                <a16:creationId xmlns:a16="http://schemas.microsoft.com/office/drawing/2014/main" id="{5A4510B1-08AD-722C-2323-BF07527ECC22}"/>
-              </a:ext>
-            </a:extLst>
-          </p:cNvPr>
-          <p:cNvPicPr>
-            <a:picLocks noChangeAspect="1"/>
-          </p:cNvPicPr>
-          <p:nvPr/>
-        </p:nvPicPr>
-        <p:blipFill>
-          <a:blip r:embed="rId3"/>
-          <a:stretch>
-            <a:fillRect/>
-          </a:stretch>
-        </p:blipFill>
-        <p:spPr>
-          <a:xfrm>
-            <a:off x="497941" y="3210079"/>
-            <a:ext cx="1747602" cy="2042971"/>
-          </a:xfrm>
-          <a:prstGeom prst="rect">
-            <a:avLst/>
-          </a:prstGeom>
-          <a:ln>
-            <a:solidFill>
-              <a:schemeClr val="tx1"/>
-            </a:solidFill>
-          </a:ln>
-          <a:effectLst>
-            <a:outerShdw blurRad="50800" dist="38100" dir="8100000" algn="tr" rotWithShape="0">
-              <a:prstClr val="black">
-                <a:alpha val="40000"/>
-              </a:prstClr>
-            </a:outerShdw>
-          </a:effectLst>
-        </p:spPr>
-      </p:pic>
-      <p:pic>
-        <p:nvPicPr>
-          <p:cNvPr id="10" name="Picture 9">
-            <a:extLst>
-              <a:ext uri="{FF2B5EF4-FFF2-40B4-BE49-F238E27FC236}">
-                <a16:creationId xmlns:a16="http://schemas.microsoft.com/office/drawing/2014/main" id="{A62E864F-8C1A-F4C5-0CF2-AA9D524EA825}"/>
-              </a:ext>
-            </a:extLst>
-          </p:cNvPr>
-          <p:cNvPicPr>
-            <a:picLocks noChangeAspect="1"/>
-          </p:cNvPicPr>
-          <p:nvPr/>
-        </p:nvPicPr>
-        <p:blipFill>
-          <a:blip r:embed="rId4"/>
-          <a:stretch>
-            <a:fillRect/>
-          </a:stretch>
-        </p:blipFill>
-        <p:spPr>
-          <a:xfrm>
-            <a:off x="2460312" y="3210079"/>
-            <a:ext cx="4513187" cy="2328503"/>
-          </a:xfrm>
-          <a:prstGeom prst="rect">
-            <a:avLst/>
-          </a:prstGeom>
-          <a:ln>
-            <a:solidFill>
-              <a:schemeClr val="tx1"/>
-            </a:solidFill>
-          </a:ln>
-          <a:effectLst>
-            <a:outerShdw blurRad="50800" dist="38100" dir="8100000" algn="tr" rotWithShape="0">
-              <a:prstClr val="black">
-                <a:alpha val="40000"/>
-              </a:prstClr>
-            </a:outerShdw>
-          </a:effectLst>
-        </p:spPr>
-      </p:pic>
-    </p:spTree>
-    <p:extLst>
-      <p:ext uri="{BB962C8B-B14F-4D97-AF65-F5344CB8AC3E}">
-        <p14:creationId xmlns:p14="http://schemas.microsoft.com/office/powerpoint/2010/main" val="430310755"/>
       </p:ext>
     </p:extLst>
   </p:cSld>

--- a/05_Linkedin_Posts/01_Latex.pptx
+++ b/05_Linkedin_Posts/01_Latex.pptx
@@ -6,6 +6,7 @@
   </p:sldMasterIdLst>
   <p:sldIdLst>
     <p:sldId id="259" r:id="rId2"/>
+    <p:sldId id="260" r:id="rId3"/>
   </p:sldIdLst>
   <p:sldSz cx="12192000" cy="6858000"/>
   <p:notesSz cx="6858000" cy="9144000"/>
@@ -261,7 +262,7 @@
           <a:p>
             <a:fld id="{9D4686FF-3DC0-4D03-9102-64E826D8EE6E}" type="datetimeFigureOut">
               <a:rPr lang="LID4096" smtClean="0"/>
-              <a:t>06/24/2026</a:t>
+              <a:t>06/26/2026</a:t>
             </a:fld>
             <a:endParaRPr lang="LID4096"/>
           </a:p>
@@ -461,7 +462,7 @@
           <a:p>
             <a:fld id="{9D4686FF-3DC0-4D03-9102-64E826D8EE6E}" type="datetimeFigureOut">
               <a:rPr lang="LID4096" smtClean="0"/>
-              <a:t>06/24/2026</a:t>
+              <a:t>06/26/2026</a:t>
             </a:fld>
             <a:endParaRPr lang="LID4096"/>
           </a:p>
@@ -671,7 +672,7 @@
           <a:p>
             <a:fld id="{9D4686FF-3DC0-4D03-9102-64E826D8EE6E}" type="datetimeFigureOut">
               <a:rPr lang="LID4096" smtClean="0"/>
-              <a:t>06/24/2026</a:t>
+              <a:t>06/26/2026</a:t>
             </a:fld>
             <a:endParaRPr lang="LID4096"/>
           </a:p>
@@ -871,7 +872,7 @@
           <a:p>
             <a:fld id="{9D4686FF-3DC0-4D03-9102-64E826D8EE6E}" type="datetimeFigureOut">
               <a:rPr lang="LID4096" smtClean="0"/>
-              <a:t>06/24/2026</a:t>
+              <a:t>06/26/2026</a:t>
             </a:fld>
             <a:endParaRPr lang="LID4096"/>
           </a:p>
@@ -1147,7 +1148,7 @@
           <a:p>
             <a:fld id="{9D4686FF-3DC0-4D03-9102-64E826D8EE6E}" type="datetimeFigureOut">
               <a:rPr lang="LID4096" smtClean="0"/>
-              <a:t>06/24/2026</a:t>
+              <a:t>06/26/2026</a:t>
             </a:fld>
             <a:endParaRPr lang="LID4096"/>
           </a:p>
@@ -1415,7 +1416,7 @@
           <a:p>
             <a:fld id="{9D4686FF-3DC0-4D03-9102-64E826D8EE6E}" type="datetimeFigureOut">
               <a:rPr lang="LID4096" smtClean="0"/>
-              <a:t>06/24/2026</a:t>
+              <a:t>06/26/2026</a:t>
             </a:fld>
             <a:endParaRPr lang="LID4096"/>
           </a:p>
@@ -1830,7 +1831,7 @@
           <a:p>
             <a:fld id="{9D4686FF-3DC0-4D03-9102-64E826D8EE6E}" type="datetimeFigureOut">
               <a:rPr lang="LID4096" smtClean="0"/>
-              <a:t>06/24/2026</a:t>
+              <a:t>06/26/2026</a:t>
             </a:fld>
             <a:endParaRPr lang="LID4096"/>
           </a:p>
@@ -1972,7 +1973,7 @@
           <a:p>
             <a:fld id="{9D4686FF-3DC0-4D03-9102-64E826D8EE6E}" type="datetimeFigureOut">
               <a:rPr lang="LID4096" smtClean="0"/>
-              <a:t>06/24/2026</a:t>
+              <a:t>06/26/2026</a:t>
             </a:fld>
             <a:endParaRPr lang="LID4096"/>
           </a:p>
@@ -2085,7 +2086,7 @@
           <a:p>
             <a:fld id="{9D4686FF-3DC0-4D03-9102-64E826D8EE6E}" type="datetimeFigureOut">
               <a:rPr lang="LID4096" smtClean="0"/>
-              <a:t>06/24/2026</a:t>
+              <a:t>06/26/2026</a:t>
             </a:fld>
             <a:endParaRPr lang="LID4096"/>
           </a:p>
@@ -2398,7 +2399,7 @@
           <a:p>
             <a:fld id="{9D4686FF-3DC0-4D03-9102-64E826D8EE6E}" type="datetimeFigureOut">
               <a:rPr lang="LID4096" smtClean="0"/>
-              <a:t>06/24/2026</a:t>
+              <a:t>06/26/2026</a:t>
             </a:fld>
             <a:endParaRPr lang="LID4096"/>
           </a:p>
@@ -2687,7 +2688,7 @@
           <a:p>
             <a:fld id="{9D4686FF-3DC0-4D03-9102-64E826D8EE6E}" type="datetimeFigureOut">
               <a:rPr lang="LID4096" smtClean="0"/>
-              <a:t>06/24/2026</a:t>
+              <a:t>06/26/2026</a:t>
             </a:fld>
             <a:endParaRPr lang="LID4096"/>
           </a:p>
@@ -2930,7 +2931,7 @@
           <a:p>
             <a:fld id="{9D4686FF-3DC0-4D03-9102-64E826D8EE6E}" type="datetimeFigureOut">
               <a:rPr lang="LID4096" smtClean="0"/>
-              <a:t>06/24/2026</a:t>
+              <a:t>06/26/2026</a:t>
             </a:fld>
             <a:endParaRPr lang="LID4096"/>
           </a:p>
@@ -5270,7 +5271,7 @@
         </p:nvSpPr>
         <p:spPr>
           <a:xfrm>
-            <a:off x="1327531" y="5902556"/>
+            <a:off x="1282266" y="5884450"/>
             <a:ext cx="1429759" cy="461665"/>
           </a:xfrm>
           <a:prstGeom prst="rect">
@@ -5466,6 +5467,96 @@
     <p:extLst>
       <p:ext uri="{BB962C8B-B14F-4D97-AF65-F5344CB8AC3E}">
         <p14:creationId xmlns:p14="http://schemas.microsoft.com/office/powerpoint/2010/main" val="3375607533"/>
+      </p:ext>
+    </p:extLst>
+  </p:cSld>
+  <p:clrMapOvr>
+    <a:masterClrMapping/>
+  </p:clrMapOvr>
+</p:sld>
+</file>
+
+<file path=ppt/slides/slide2.xml><?xml version="1.0" encoding="utf-8"?>
+<p:sld xmlns:a="http://schemas.openxmlformats.org/drawingml/2006/main" xmlns:r="http://schemas.openxmlformats.org/officeDocument/2006/relationships" xmlns:p="http://schemas.openxmlformats.org/presentationml/2006/main">
+  <p:cSld>
+    <p:spTree>
+      <p:nvGrpSpPr>
+        <p:cNvPr id="1" name=""/>
+        <p:cNvGrpSpPr/>
+        <p:nvPr/>
+      </p:nvGrpSpPr>
+      <p:grpSpPr>
+        <a:xfrm>
+          <a:off x="0" y="0"/>
+          <a:ext cx="0" cy="0"/>
+          <a:chOff x="0" y="0"/>
+          <a:chExt cx="0" cy="0"/>
+        </a:xfrm>
+      </p:grpSpPr>
+      <p:pic>
+        <p:nvPicPr>
+          <p:cNvPr id="5" name="Picture 4">
+            <a:extLst>
+              <a:ext uri="{FF2B5EF4-FFF2-40B4-BE49-F238E27FC236}">
+                <a16:creationId xmlns:a16="http://schemas.microsoft.com/office/drawing/2014/main" id="{3C518FC7-2EB5-F34C-5ACD-098BE785066B}"/>
+              </a:ext>
+            </a:extLst>
+          </p:cNvPr>
+          <p:cNvPicPr>
+            <a:picLocks noChangeAspect="1"/>
+          </p:cNvPicPr>
+          <p:nvPr/>
+        </p:nvPicPr>
+        <p:blipFill>
+          <a:blip r:embed="rId2"/>
+          <a:stretch>
+            <a:fillRect/>
+          </a:stretch>
+        </p:blipFill>
+        <p:spPr>
+          <a:xfrm>
+            <a:off x="829524" y="639024"/>
+            <a:ext cx="4648200" cy="3352800"/>
+          </a:xfrm>
+          <a:prstGeom prst="rect">
+            <a:avLst/>
+          </a:prstGeom>
+        </p:spPr>
+      </p:pic>
+      <p:pic>
+        <p:nvPicPr>
+          <p:cNvPr id="11" name="Picture 10">
+            <a:extLst>
+              <a:ext uri="{FF2B5EF4-FFF2-40B4-BE49-F238E27FC236}">
+                <a16:creationId xmlns:a16="http://schemas.microsoft.com/office/drawing/2014/main" id="{488590C9-67E9-48DF-431B-C7A64EA3F6E0}"/>
+              </a:ext>
+            </a:extLst>
+          </p:cNvPr>
+          <p:cNvPicPr>
+            <a:picLocks noChangeAspect="1"/>
+          </p:cNvPicPr>
+          <p:nvPr/>
+        </p:nvPicPr>
+        <p:blipFill>
+          <a:blip r:embed="rId3"/>
+          <a:stretch>
+            <a:fillRect/>
+          </a:stretch>
+        </p:blipFill>
+        <p:spPr>
+          <a:xfrm>
+            <a:off x="6192805" y="888135"/>
+            <a:ext cx="3952875" cy="2981325"/>
+          </a:xfrm>
+          <a:prstGeom prst="rect">
+            <a:avLst/>
+          </a:prstGeom>
+        </p:spPr>
+      </p:pic>
+    </p:spTree>
+    <p:extLst>
+      <p:ext uri="{BB962C8B-B14F-4D97-AF65-F5344CB8AC3E}">
+        <p14:creationId xmlns:p14="http://schemas.microsoft.com/office/powerpoint/2010/main" val="1384084555"/>
       </p:ext>
     </p:extLst>
   </p:cSld>
